--- a/materials/prompt_engineering_3_hour_workshop.pptx
+++ b/materials/prompt_engineering_3_hour_workshop.pptx
@@ -822,7 +822,7 @@
           <a:lstStyle/>
           <a:p>
             <a:r>
-              <a:t>Reserve 6 minutes for feedback, retries, and a short discussion. Use the task-specific maximum points: Lab 1 uses 20/20/20/40; other labs use 25 each. Ask: What makes few-shot examples useful? Correct answer: They demonstrate the intended mapping and consistent format.. Never use model self-confidence as proof of correctness.</a:t>
+              <a:t>Reserve 6 minutes for feedback, retries, and a short discussion. Use the task-specific maximum points: Lab 1 uses 20/20/20/40; other labs use 25 each. Ask: Why is it important to use few-shot examples for edge cases like PII or medical advice? Correct answer: They demonstrate exactly how to format the fallback response without processing the sensitive data.. Never use model self-confidence as proof of correctness.</a:t>
             </a:r>
           </a:p>
         </p:txBody>
@@ -6666,7 +6666,7 @@
               </a:defRPr>
             </a:pPr>
             <a:r>
-              <a:t>Few-shot examples</a:t>
+              <a:t>Few-shot examples: Content Moderation &amp; PII</a:t>
             </a:r>
           </a:p>
         </p:txBody>
@@ -6705,7 +6705,7 @@
               </a:defRPr>
             </a:pPr>
             <a:r>
-              <a:t>Show consistent input/output examples to teach a pattern. Test the pattern on new inputs, including an edge case.</a:t>
+              <a:t>Show consistent input/output examples to teach a pattern, specifically for handling edge cases like PII and safety.</a:t>
             </a:r>
           </a:p>
           <a:p>
@@ -6955,7 +6955,7 @@
               </a:defRPr>
             </a:pPr>
             <a:r>
-              <a:t>Feedback: Password reset email never arrives.</a:t>
+              <a:t>Classify comments as SAFE or TOXIC. Return only the label.</a:t>
             </a:r>
           </a:p>
           <a:p>
@@ -6971,7 +6971,7 @@
               </a:defRPr>
             </a:pPr>
             <a:r>
-              <a:t>Title: [Auth] Password reset email missing</a:t>
+              <a:t>Comment: Great service!</a:t>
             </a:r>
           </a:p>
           <a:p>
@@ -6987,7 +6987,7 @@
               </a:defRPr>
             </a:pPr>
             <a:r>
-              <a:t>Feedback: Dark mode text is unreadable.</a:t>
+              <a:t>Label: SAFE</a:t>
             </a:r>
           </a:p>
           <a:p>
@@ -7003,7 +7003,23 @@
               </a:defRPr>
             </a:pPr>
             <a:r>
-              <a:t>Title: [UI] Low contrast in dark mode</a:t>
+              <a:t>Comment: You people are absolute idiots.</a:t>
+            </a:r>
+          </a:p>
+          <a:p>
+            <a:pPr>
+              <a:spcAft>
+                <a:spcPts val="1600"/>
+              </a:spcAft>
+              <a:defRPr sz="2500" b="0">
+                <a:solidFill>
+                  <a:srgbClr val="F6F8FC"/>
+                </a:solidFill>
+                <a:latin typeface="Aptos"/>
+              </a:defRPr>
+            </a:pPr>
+            <a:r>
+              <a:t>Label: TOXIC</a:t>
             </a:r>
           </a:p>
         </p:txBody>
@@ -7224,7 +7240,36 @@
               </a:defRPr>
             </a:pPr>
             <a:r>
-              <a:t>Write a ticket-title prompt containing 2–4 input/output examples. Require [Area] Description titles of at most 60 characters. Include these test inputs: PDF uploads over 10MB crash on iPhone; Google login fails on Safari; CSV export stops after 100 rows. Request a JSON array of three titles in that order. Submit the prompt, not the final titles.</a:t>
+              <a:t>Your company is an online pharmacy. You need an AI to summarize long user reviews into a single short sentence. However, there are two legal edge cases: 1. Users sometimes include PII like phone numbers or national IDs. 2. Users ask for medical advice (e.g., "Does this interact with aspirin?"). If published, the company faces fines.</a:t>
+            </a:r>
+          </a:p>
+          <a:p>
+            <a:pPr>
+              <a:spcAft>
+                <a:spcPts val="1600"/>
+              </a:spcAft>
+              <a:defRPr sz="2400" b="0">
+                <a:solidFill>
+                  <a:srgbClr val="F6F8FC"/>
+                </a:solidFill>
+                <a:latin typeface="Aptos"/>
+              </a:defRPr>
+            </a:pPr>
+          </a:p>
+          <a:p>
+            <a:pPr>
+              <a:spcAft>
+                <a:spcPts val="1600"/>
+              </a:spcAft>
+              <a:defRPr sz="2400" b="0">
+                <a:solidFill>
+                  <a:srgbClr val="F6F8FC"/>
+                </a:solidFill>
+                <a:latin typeface="Aptos"/>
+              </a:defRPr>
+            </a:pPr>
+            <a:r>
+              <a:t>Write a few-shot prompt that summarizes safe reviews into one sentence, but uses at least two edge-case examples to teach the model to return ONLY the tag [FLAG_PII] if personal info is present, and ONLY the tag [FLAG_MEDICAL] if medical advice is requested, without generating any summary. Do not write the final reviews, just the instructions and examples.</a:t>
             </a:r>
           </a:p>
         </p:txBody>
@@ -7445,7 +7490,7 @@
               </a:defRPr>
             </a:pPr>
             <a:r>
-              <a:t>• Includes 2–4 relevant input/output examples.</a:t>
+              <a:t>• PII Example (20 points): The prompt must include a distinct example demonstrating the PII rule (e.g., phone number or national ID).</a:t>
             </a:r>
           </a:p>
           <a:p>
@@ -7461,7 +7506,7 @@
               </a:defRPr>
             </a:pPr>
             <a:r>
-              <a:t>• Examples consistently demonstrate [Area] Description and the 60-character limit.</a:t>
+              <a:t>• Medical Example (20 points): The prompt must include a distinct example demonstrating the medical advice rule.</a:t>
             </a:r>
           </a:p>
           <a:p>
@@ -7477,7 +7522,7 @@
               </a:defRPr>
             </a:pPr>
             <a:r>
-              <a:t>• Includes all three test inputs with important details, separated from examples.</a:t>
+              <a:t>• Processing Prevention (40 points): In the edge-case examples, the model must be shown returning ONLY the fallback tag ([FLAG_PII] or [FLAG_MEDICAL]) without any accompanying summary or processing of the sensitive text.</a:t>
             </a:r>
           </a:p>
           <a:p>
@@ -7493,7 +7538,7 @@
               </a:defRPr>
             </a:pPr>
             <a:r>
-              <a:t>• Requests a JSON array of three titles in input order while preserving key details.</a:t>
+              <a:t>• Instruction Clarity (20 points): The initial instructions clearly explain the rules for both safe reviews and edge cases, and align perfectly with the behavior demonstrated in the examples.</a:t>
             </a:r>
           </a:p>
         </p:txBody>

--- a/materials/prompt_engineering_3_hour_workshop.pptx
+++ b/materials/prompt_engineering_3_hour_workshop.pptx
@@ -1102,7 +1102,7 @@
           <a:lstStyle/>
           <a:p>
             <a:r>
-              <a:t>Reserve 6 minutes for feedback, retries, and a short discussion. Use the task-specific maximum points: Lab 1 uses 20/20/20/40; other labs use 25 each. Ask: What is the strongest verification of this calculation? Correct answer: Recompute the quantities and discount independently in Python.. Never use model self-confidence as proof of correctness.</a:t>
+              <a:t>Reserve 6 minutes for feedback, retries, and a short discussion. Use the task-specific maximum points: Lab 1 uses 20/20/20/40; other labs use 25 each. Ask: Why is Chain-of-thought (CoT) crucial for analyzing server logs? Correct answer: It forces the model to methodically analyze errors rather than jumping to false conclusions based on superficial warnings.. Never use model self-confidence as proof of correctness.</a:t>
             </a:r>
           </a:p>
         </p:txBody>
@@ -1452,7 +1452,7 @@
           <a:lstStyle/>
           <a:p>
             <a:r>
-              <a:t>Reserve 6 minutes for feedback, retries, and a short discussion. Use the task-specific maximum points: Lab 1 uses 20/20/20/40; other labs use 25 each. Ask: What should the model return for an unknown price? Correct answer: null, as required by the schema.. Never use model self-confidence as proof of correctness.</a:t>
+              <a:t>Reserve 6 minutes for feedback, retries, and a short discussion. Use the task-specific maximum points: Lab 1 uses 20/20/20/40; other labs use 25 each. Ask: What is the most reliable way to enforce a complex relational JSON structure? Correct answer: Provide an explicit visual template/shape of the JSON structure including brackets, keys, and comments for relationships.. Never use model self-confidence as proof of correctness.</a:t>
             </a:r>
           </a:p>
         </p:txBody>
@@ -1802,7 +1802,7 @@
           <a:lstStyle/>
           <a:p>
             <a:r>
-              <a:t>Reserve 5 minutes for feedback, retries, and a short discussion. Use the task-specific maximum points: Lab 1 uses 20/20/20/40; other labs use 25 each. Ask: Which follow-up is most actionable? Correct answer: Use two factual sentences and include Google Calendar.. Never use model self-confidence as proof of correctness.</a:t>
+              <a:t>Reserve 5 minutes for feedback, retries, and a short discussion. Use the task-specific maximum points: Lab 1 uses 20/20/20/40; other labs use 25 each. Ask: What is the most effective way to prevent the AI from using dramatic tone or personal bias? Correct answer: Use strict negative constraints (e.g., "Absolutely do not use dramatic adjectives or personal analysis").. Never use model self-confidence as proof of correctness.</a:t>
             </a:r>
           </a:p>
         </p:txBody>
@@ -2152,7 +2152,7 @@
           <a:lstStyle/>
           <a:p>
             <a:r>
-              <a:t>Reserve 5 minutes for feedback, retries, and a short discussion. Use the task-specific maximum points: Lab 1 uses 20/20/20/40; other labs use 25 each. Ask: When is an interview most useful? Correct answer: When important requirements are missing or ambiguous.. Never use model self-confidence as proof of correctness.</a:t>
+              <a:t>Reserve 5 minutes for feedback, retries, and a short discussion. Use the task-specific maximum points: Lab 1 uses 20/20/20/40; other labs use 25 each. Ask: Why is the "ask exactly one question at a time" rule important in an interview prompt? Correct answer: To prevent the AI from dumping 20 questions on you at once in a single message.. Never use model self-confidence as proof of correctness.</a:t>
             </a:r>
           </a:p>
         </p:txBody>
@@ -2432,7 +2432,7 @@
           <a:lstStyle/>
           <a:p>
             <a:r>
-              <a:t>Reserve 6 minutes for feedback, retries, and a short discussion. Use the task-specific maximum points: Lab 1 uses 20/20/20/40; other labs use 25 each. Ask: How should a model self-critique be used? Correct answer: As feedback to verify against a separate rubric or checks.. Never use model self-confidence as proof of correctness.</a:t>
+              <a:t>Reserve 6 minutes for feedback, retries, and a short discussion. Use the task-specific maximum points: Lab 1 uses 20/20/20/40; other labs use 25 each. Ask: Why should you specify exact metrics (like "Error Handling") in a self-critique prompt? Correct answer: If you just say "critique this", the AI won't know what angle to analyze from and will give generic feedback.. Never use model self-confidence as proof of correctness.</a:t>
             </a:r>
           </a:p>
         </p:txBody>
@@ -7720,7 +7720,7 @@
               </a:defRPr>
             </a:pPr>
             <a:r>
-              <a:t>Decomposition and verification</a:t>
+              <a:t>Chain-of-thought (CoT): Multi-step Debugging</a:t>
             </a:r>
           </a:p>
         </p:txBody>
@@ -7759,7 +7759,7 @@
               </a:defRPr>
             </a:pPr>
             <a:r>
-              <a:t>Break a problem into checkable intermediate results. Request a concise calculation summary and verify it with Python; verbose reasoning is not proof.</a:t>
+              <a:t>Ask the model to reason step by step before giving the final answer. Reduces errors on logic, math, multi-step planning, and debugging.</a:t>
             </a:r>
           </a:p>
           <a:p>
@@ -8009,7 +8009,7 @@
               </a:defRPr>
             </a:pPr>
             <a:r>
-              <a:t>Calculate the subtotal, the discount amount, and the final total. Return the three numeric values as JSON and avoid assuming tax or additional fees.</a:t>
+              <a:t>A store sells pens for $2 and notebooks for $5. Sarah buys 3 pens and 2 notebooks. She has a 10% off coupon. How much does she pay? Think step by step: find subtotal, then apply discount, then state final amount.</a:t>
             </a:r>
           </a:p>
         </p:txBody>
@@ -8230,7 +8230,7 @@
               </a:defRPr>
             </a:pPr>
             <a:r>
-              <a:t>Write a prompt for buying 3 pens at $2 each and 2 notebooks at $5 each with a 10% discount. Request numeric JSON fields subtotal, discount, and total. Specify the calculation stages and an independent verification step. Do not assume tax or extra fees. Submit instructions, not the numerical answer.</a:t>
+              <a:t>You are a developer whose site just crashed. You have a 50-line error log. If you ask an AI "what is the problem?", it often jumps to the first superficial warning it sees and gives a wrong solution, wasting hours. Write a prompt using the Chain-of-thought technique to force the AI to logically dissect the logs step-by-step before providing a final solution. Do not include the actual log; just write the prompt instructions.</a:t>
             </a:r>
           </a:p>
         </p:txBody>
@@ -8451,7 +8451,7 @@
               </a:defRPr>
             </a:pPr>
             <a:r>
-              <a:t>• Includes accurate prices, quantities, and discount rate.</a:t>
+              <a:t>• Prevent jumping to answer (30 points): Explicitly requests the model to not provide the final answer or solution immediately.</a:t>
             </a:r>
           </a:p>
           <a:p>
@@ -8467,7 +8467,7 @@
               </a:defRPr>
             </a:pPr>
             <a:r>
-              <a:t>• Clearly specifies subtotal, discount, and total calculation stages.</a:t>
+              <a:t>• Log analysis step (20 points): Instructs the model to first find and list the critical or fatal errors.</a:t>
             </a:r>
           </a:p>
           <a:p>
@@ -8483,7 +8483,7 @@
               </a:defRPr>
             </a:pPr>
             <a:r>
-              <a:t>• Defines a numeric JSON contract with the three exact keys.</a:t>
+              <a:t>• Deduction step (20 points): Instructs the model to deduce the root cause from the found errors before giving a final single actionable solution.</a:t>
             </a:r>
           </a:p>
           <a:p>
@@ -8499,7 +8499,7 @@
               </a:defRPr>
             </a:pPr>
             <a:r>
-              <a:t>• Requests independent verification and forbids extra cost assumptions.</a:t>
+              <a:t>• CoT Keywords (30 points): Uses explicit phrases like "Think step by step" or "Show your reasoning steps".</a:t>
             </a:r>
           </a:p>
         </p:txBody>
@@ -8681,7 +8681,7 @@
               </a:defRPr>
             </a:pPr>
             <a:r>
-              <a:t>Structured output and grounding</a:t>
+              <a:t>Structured output: Relational JSON Shape</a:t>
             </a:r>
           </a:p>
         </p:txBody>
@@ -8720,7 +8720,7 @@
               </a:defRPr>
             </a:pPr>
             <a:r>
-              <a:t>A requested JSON shape still needs parsing, schema checks, and factual validation. Missing information should remain unknown.</a:t>
+              <a:t>Use visual structural shapes in your prompt to enforce strict output formats. Define foreign keys explicitly in the JSON shape.</a:t>
             </a:r>
           </a:p>
           <a:p>
@@ -8970,7 +8970,7 @@
               </a:defRPr>
             </a:pPr>
             <a:r>
-              <a:t>Use only the supplied facts. Return JSON only with products, each containing name, price_usd, and support. Use null for an unknown price. Do not add markdown fences.</a:t>
+              <a:t>Extract users and tasks from meeting transcripts. The output must be exactly a JSON object containing a "users" array and a "tasks" array. Link them using a numeric userId.</a:t>
             </a:r>
           </a:p>
         </p:txBody>
@@ -9428,7 +9428,7 @@
               </a:defRPr>
             </a:pPr>
             <a:r>
-              <a:t>Write a prompt to convert these facts to JSON: OurApp costs $12/month with email support; TeamFlow costs $18/month with chat support; SoloDesk has an unknown price and community support. Require a products array in that order, with name, price_usd, and support. Use null for the unknown price and only the supplied facts. Submit the prompt, not the resulting JSON.</a:t>
+              <a:t>You have a transcript of a business meeting: "Ali, prepare the financial report by tomorrow. Sara, set up a meeting with the marketing team." Your project management backend requires a relational JSON structure where the "users" array and "tasks" array are separate, and tasks are linked to users via a foreign key ID. Write a prompt that extracts this information. You must explicitly draw the JSON shape in your prompt to show how to link the IDs (e.g., userId in users must match assignedTo in tasks). Do not provide the actual transcript, just the instructions.</a:t>
             </a:r>
           </a:p>
         </p:txBody>
@@ -9649,7 +9649,7 @@
               </a:defRPr>
             </a:pPr>
             <a:r>
-              <a:t>• Includes all facts about the three products without contradictions.</a:t>
+              <a:t>• Visual JSON Skeleton (25 points): Provides an explicit visual template of the JSON containing the arrays "users" and "tasks".</a:t>
             </a:r>
           </a:p>
           <a:p>
@@ -9665,7 +9665,7 @@
               </a:defRPr>
             </a:pPr>
             <a:r>
-              <a:t>• Defines products, name, price_usd, support, and their data types.</a:t>
+              <a:t>• Strict Key Definition (25 points): The drawn template explicitly dictates the keys inside the objects (e.g. userId, name, taskDescription, deadline, assignedTo).</a:t>
             </a:r>
           </a:p>
           <a:p>
@@ -9681,7 +9681,7 @@
               </a:defRPr>
             </a:pPr>
             <a:r>
-              <a:t>• Requires null for unknown prices and forbids invented facts.</a:t>
+              <a:t>• Linking logic (30 points): Clearly defines the relationship between the user ID and the task assignedTo field (e.g., via inline comments in the template).</a:t>
             </a:r>
           </a:p>
           <a:p>
@@ -9697,7 +9697,7 @@
               </a:defRPr>
             </a:pPr>
             <a:r>
-              <a:t>• Specifies JSON only, product order, and output validation.</a:t>
+              <a:t>• Output restriction (20 points): Explicitly forbids any conversational text before or after the JSON.</a:t>
             </a:r>
           </a:p>
         </p:txBody>
@@ -10132,7 +10132,7 @@
               </a:defRPr>
             </a:pPr>
             <a:r>
-              <a:t>Constraints and iterative refinement</a:t>
+              <a:t>Tone control (Pure Negative Constraints)</a:t>
             </a:r>
           </a:p>
         </p:txBody>
@@ -10171,7 +10171,7 @@
               </a:defRPr>
             </a:pPr>
             <a:r>
-              <a:t>Turn a vague critique into a concrete revision request. Compare the new result against the original requirements.</a:t>
+              <a:t>Simulate conversation (Iterative Refinement Flow) to fix model habits. If it outputs a bad tone, refine it iteratively instead of writing one perfect prompt.</a:t>
             </a:r>
           </a:p>
           <a:p>
@@ -10421,7 +10421,39 @@
               </a:defRPr>
             </a:pPr>
             <a:r>
-              <a:t>Revise the draft into two factual sentences. Describe smart scheduling and its Google Calendar integration without exaggerated claims. Preserve the requested limits.</a:t>
+              <a:t>Step 2 (Fix Tone): "This is too friendly. Remove emojis and make the tone strictly corporate."</a:t>
+            </a:r>
+          </a:p>
+          <a:p>
+            <a:pPr>
+              <a:spcAft>
+                <a:spcPts val="1600"/>
+              </a:spcAft>
+              <a:defRPr sz="2500" b="0">
+                <a:solidFill>
+                  <a:srgbClr val="F6F8FC"/>
+                </a:solidFill>
+                <a:latin typeface="Aptos"/>
+              </a:defRPr>
+            </a:pPr>
+            <a:r>
+              <a:t>Step 3 (Fix Length): "Too long. Summarize the entire email in exactly 2 short paragraphs."</a:t>
+            </a:r>
+          </a:p>
+          <a:p>
+            <a:pPr>
+              <a:spcAft>
+                <a:spcPts val="1600"/>
+              </a:spcAft>
+              <a:defRPr sz="2500" b="0">
+                <a:solidFill>
+                  <a:srgbClr val="F6F8FC"/>
+                </a:solidFill>
+                <a:latin typeface="Aptos"/>
+              </a:defRPr>
+            </a:pPr>
+            <a:r>
+              <a:t>Step 4 (Add Missing Details): "In the second paragraph, add that the requested amount is exactly $500/month for new software."</a:t>
             </a:r>
           </a:p>
         </p:txBody>
@@ -10642,7 +10674,7 @@
               </a:defRPr>
             </a:pPr>
             <a:r>
-              <a:t>Write a revision prompt and include this original draft: “Welcome! Smart scheduling is revolutionary. It fixes every meeting problem. Buy now!” Require exactly two factual sentences, at most 50 words, mentioning Google Calendar. Ban Welcome, revolutionary, and Buy now. Identify the original defects and specify how to check the revision. Submit only the revision instructions.</a:t>
+              <a:t>You are the editor of a neutral corporate newsletter. You want the AI to summarize a sensitive news story (e.g., a stock drop or a competitive event). The problem is the AI loves dramatic words ("disaster", "shocking") and sometimes inserts personal bias. Write a prompt to summarize the news using at least 3 negative constraints (must nots) to ensure the text is completely neutral, unbiased, and free of exaggerated words. Do not provide the actual news text, just the instructions.</a:t>
             </a:r>
           </a:p>
         </p:txBody>
@@ -10863,7 +10895,7 @@
               </a:defRPr>
             </a:pPr>
             <a:r>
-              <a:t>• Includes the original draft and identifies concrete defects.</a:t>
+              <a:t>• Assertiveness (25 points): Uses strong, unambiguous prohibitive language (e.g., "absolutely do not", "never").</a:t>
             </a:r>
           </a:p>
           <a:p>
@@ -10879,7 +10911,7 @@
               </a:defRPr>
             </a:pPr>
             <a:r>
-              <a:t>• Explicitly requires exactly two sentences and at most 50 words.</a:t>
+              <a:t>• Bans emotional language (25 points): Explicitly forbids the use of dramatic, emotional, or exaggerated adjectives.</a:t>
             </a:r>
           </a:p>
           <a:p>
@@ -10895,7 +10927,7 @@
               </a:defRPr>
             </a:pPr>
             <a:r>
-              <a:t>• Requires Google Calendar and excludes all three prohibited phrases.</a:t>
+              <a:t>• Bans personal bias (25 points): Explicitly forbids personal opinions, analysis, or direct quotes.</a:t>
             </a:r>
           </a:p>
           <a:p>
@@ -10911,7 +10943,7 @@
               </a:defRPr>
             </a:pPr>
             <a:r>
-              <a:t>• Requests factual language, removal of unsupported claims, and a revision check.</a:t>
+              <a:t>• Format restriction (25 points): Specifies a negative format constraint (e.g., "do not use bullet points").</a:t>
             </a:r>
           </a:p>
         </p:txBody>
@@ -11132,7 +11164,7 @@
               </a:defRPr>
             </a:pPr>
             <a:r>
-              <a:t>Ask targeted questions to resolve uncertainty before drafting. State a stopping condition so the interview can finish.</a:t>
+              <a:t>System Architecture Design (for Devs). Complex designs (like a ride-hailing DB schema) depend on volume, real-time needs, and budget. Instead of a direct prompt, have the AI interview you as an architect.</a:t>
             </a:r>
           </a:p>
           <a:p>
@@ -11382,7 +11414,7 @@
               </a:defRPr>
             </a:pPr>
             <a:r>
-              <a:t>Before drafting, ask one question at a time about missing requirements. Wait for each answer. Once audience, tone, and product policy are known, summarize the brief and draft.</a:t>
+              <a:t>Act as a Senior System Architect. I need a database schema for a ride-hailing app. Do not design the DB yet! Interview me to understand the technical requirements. Ask exactly one question at a time and wait for my answer. Once you fully understand the constraints, say "Requirements clear" and propose the schema.</a:t>
             </a:r>
           </a:p>
         </p:txBody>
@@ -11603,7 +11635,7 @@
               </a:defRPr>
             </a:pPr>
             <a:r>
-              <a:t>Write an interview prompt for an article about async standups. Resolve audience, tone, and product mentions. Ask one question at a time and wait for each answer. Define when to stop interviewing, confirm the brief, and start drafting. Do not run the interview or invent user answers.</a:t>
+              <a:t>You want a highly personalized cover letter for a "Product Manager" role. A direct prompt yields generic robotic text. You want the AI to act as a "Career Coach" and interview you about your real past experiences. Write a prompt that instructs the AI to read a job description [job description text], interview you one question at a time to extract exactly 3 matching accomplishments, and then write the final cover letter once it has enough data. Submit only the prompt instructions.</a:t>
             </a:r>
           </a:p>
         </p:txBody>
@@ -12109,7 +12141,7 @@
               </a:defRPr>
             </a:pPr>
             <a:r>
-              <a:t>• Covers the article goal and missing audience, tone, and product policy.</a:t>
+              <a:t>• External Reference Context (30 points): Instructs the AI to base its questions on analyzing the provided job description.</a:t>
             </a:r>
           </a:p>
           <a:p>
@@ -12125,7 +12157,7 @@
               </a:defRPr>
             </a:pPr>
             <a:r>
-              <a:t>• Explicitly asks one question at a time and waits for an answer.</a:t>
+              <a:t>• Single Question Rule (30 points): Explicitly limits the AI to asking exactly one question at a time and waiting for a reply.</a:t>
             </a:r>
           </a:p>
           <a:p>
@@ -12141,7 +12173,7 @@
               </a:defRPr>
             </a:pPr>
             <a:r>
-              <a:t>• Defines a stopping condition and confirmation of the collected brief.</a:t>
+              <a:t>• Stopping Condition Definition (20 points): Clearly defines when the interview should end (e.g., after collecting 3 matching accomplishments).</a:t>
             </a:r>
           </a:p>
           <a:p>
@@ -12157,7 +12189,7 @@
               </a:defRPr>
             </a:pPr>
             <a:r>
-              <a:t>• Drafting begins only after context is complete; user answers are not invented.</a:t>
+              <a:t>• Final Action Trigger (20 points): Instructs the AI to state a completion phrase (e.g., "I have enough data") and then output the final cover letter.</a:t>
             </a:r>
           </a:p>
         </p:txBody>
@@ -12378,7 +12410,7 @@
               </a:defRPr>
             </a:pPr>
             <a:r>
-              <a:t>Persistent instructions define behavior; user messages define the current task. Split a workflow into stages with explicit handoffs and verify critiques.</a:t>
+              <a:t>Code Self-Critique (for Developers). If the AI writes a script, it might miss edge cases. Force it to take a QA Role, evaluate its own code against a specific metric (e.g. Error Handling), and rewrite it.</a:t>
             </a:r>
           </a:p>
           <a:p>
@@ -12628,7 +12660,7 @@
               </a:defRPr>
             </a:pPr>
             <a:r>
-              <a:t>Persistent rule: Do not invent Python APIs; mark uncertainty. User task: Help beginners debug a KeyError. First outline, then draft from the outline, then critique against accuracy and clarity, then revise.</a:t>
+              <a:t>Here is the code you wrote: [Python code]. Now act as a Senior QA Engineer. Evaluate this code and score it 1 to 5 on "Error Handling". Identify two edge cases that might cause it to crash. Then rewrite the code using Try/Except blocks to handle those errors.</a:t>
             </a:r>
           </a:p>
         </p:txBody>
@@ -12849,7 +12881,7 @@
               </a:defRPr>
             </a:pPr>
             <a:r>
-              <a:t>Write a prompt or message sequence for an outline → draft → critique → revision workflow for a beginner Python KeyError guide. Separate persistent rules from the user task. Require three outline headings and at most 100 words each for draft and revision. Request JSON with outline, draft, critique, and revision. Define stage handoffs and accuracy checks. Do not execute the workflow.</a:t>
+              <a:t>You are a logistics AI startup founder writing a short pitch email to an investor. An AI will normally use annoying exaggerated words and a begging tone. You must design a Prompt Chain. You cannot use a one-shot prompt. In one of the stages, force the AI to evaluate and critique its own text (Self-evaluation) to ensure all promotional words and begging tone are removed. Submit the prompts you would type in each stage (you must specify what you say in the first stage, how you force the model to confess its flaws in the second, and how you wrap it up in the final stage).</a:t>
             </a:r>
           </a:p>
         </p:txBody>
@@ -13070,7 +13102,7 @@
               </a:defRPr>
             </a:pPr>
             <a:r>
-              <a:t>• Separates persistent rules from the user request and requires technical accuracy.</a:t>
+              <a:t>• Chain Separation (30 points): The participant clearly separates the workflow into 3 sequential prompts and does not combine them into one single request.</a:t>
             </a:r>
           </a:p>
           <a:p>
@@ -13086,7 +13118,7 @@
               </a:defRPr>
             </a:pPr>
             <a:r>
-              <a:t>• Defines all four stages and how each output feeds the next.</a:t>
+              <a:t>• Evaluation Metric Creation (20 points): The critique stage invents a specific evaluation metric or method (e.g., scoring from 1-10).</a:t>
             </a:r>
           </a:p>
           <a:p>
@@ -13102,7 +13134,7 @@
               </a:defRPr>
             </a:pPr>
             <a:r>
-              <a:t>• Specifies the JSON contract, three headings, and both 100-word limits.</a:t>
+              <a:t>• Flaw Identification Mechanism (20 points): The critique stage forces the model to explicitly list out the specific flaws or banned words used.</a:t>
             </a:r>
           </a:p>
           <a:p>
@@ -13118,7 +13150,7 @@
               </a:defRPr>
             </a:pPr>
             <a:r>
-              <a:t>• Critiques accuracy and clarity and requires the revision to address that critique.</a:t>
+              <a:t>• Chain Connection (30 points): The final rewrite prompt explicitly commands the AI to use the results/flaws from its own critique.</a:t>
             </a:r>
           </a:p>
         </p:txBody>

--- a/materials/prompt_engineering_3_hour_workshop.pptx
+++ b/materials/prompt_engineering_3_hour_workshop.pptx
@@ -822,7 +822,7 @@
           <a:lstStyle/>
           <a:p>
             <a:r>
-              <a:t>Reserve 6 minutes for feedback, retries, and a short discussion. Use the task-specific maximum points: Lab 1 uses 20/20/20/40; other labs use 25 each. Ask: Why is it important to use few-shot examples for edge cases like PII or medical advice? Correct answer: They demonstrate exactly how to format the fallback response without processing the sensitive data.. Never use model self-confidence as proof of correctness.</a:t>
+              <a:t>Reserve 6 minutes for feedback, retries, and a short discussion. Use the task-specific maximum points: Lab 1 uses 20/20/20/40; other labs use 25 each. Ask: In a few-shot prompt for the pharmacy reviews, which design most reliably makes the model return ONLY [FLAG_PII] for a review containing a phone number? Correct answer: Include an example where a review with a phone number maps to exactly "[FLAG_PII]" and nothing else, keeping the same input/output format across all examples.. Never use model self-confidence as proof of correctness.</a:t>
             </a:r>
           </a:p>
         </p:txBody>
@@ -1102,7 +1102,7 @@
           <a:lstStyle/>
           <a:p>
             <a:r>
-              <a:t>Reserve 6 minutes for feedback, retries, and a short discussion. Use the task-specific maximum points: Lab 1 uses 20/20/20/40; other labs use 25 each. Ask: Why is Chain-of-thought (CoT) crucial for analyzing server logs? Correct answer: It forces the model to methodically analyze errors rather than jumping to false conclusions based on superficial warnings.. Never use model self-confidence as proof of correctness.</a:t>
+              <a:t>Reserve 6 minutes for feedback, retries, and a short discussion. Use the task-specific maximum points: Lab 1 uses 20/20/20/40; other labs use 25 each. Ask: Why does asking the model to reason step by step before answering improve the analysis of a long error log? Correct answer: Each reasoning token it writes becomes part of the context, so the final answer is conditioned on the listed errors and deductions instead of the first salient warning.. Never use model self-confidence as proof of correctness.</a:t>
             </a:r>
           </a:p>
         </p:txBody>
@@ -1452,7 +1452,7 @@
           <a:lstStyle/>
           <a:p>
             <a:r>
-              <a:t>Reserve 6 minutes for feedback, retries, and a short discussion. Use the task-specific maximum points: Lab 1 uses 20/20/20/40; other labs use 25 each. Ask: What is the most reliable way to enforce a complex relational JSON structure? Correct answer: Provide an explicit visual template/shape of the JSON structure including brackets, keys, and comments for relationships.. Never use model self-confidence as proof of correctness.</a:t>
+              <a:t>Reserve 6 minutes for feedback, retries, and a short discussion. Use the task-specific maximum points: Lab 1 uses 20/20/20/40; other labs use 25 each. Ask: Your prompt includes a JSON skeleton where tasks[].assignedTo must match users[].userId. What is the main remaining risk and the best mitigation? Correct answer: The model can still invent or mismatch IDs or add text around the JSON; forbid extra text and validate in code that the JSON parses and every assignedTo exists in users.. Never use model self-confidence as proof of correctness.</a:t>
             </a:r>
           </a:p>
         </p:txBody>
@@ -1802,7 +1802,7 @@
           <a:lstStyle/>
           <a:p>
             <a:r>
-              <a:t>Reserve 5 minutes for feedback, retries, and a short discussion. Use the task-specific maximum points: Lab 1 uses 20/20/20/40; other labs use 25 each. Ask: What is the most effective way to prevent the AI from using dramatic tone or personal bias? Correct answer: Use strict negative constraints (e.g., "Absolutely do not use dramatic adjectives or personal analysis").. Never use model self-confidence as proof of correctness.</a:t>
+              <a:t>Reserve 5 minutes for feedback, retries, and a short discussion. Use the task-specific maximum points: Lab 1 uses 20/20/20/40; other labs use 25 each. Ask: Which statement about negative constraints ("Do not ...") is most accurate? Correct answer: They work best when specific (e.g., "do not use words like shocking or disaster") and paired with what to do instead, because vague bans leave the model guessing.. Never use model self-confidence as proof of correctness.</a:t>
             </a:r>
           </a:p>
         </p:txBody>
@@ -2152,7 +2152,7 @@
           <a:lstStyle/>
           <a:p>
             <a:r>
-              <a:t>Reserve 5 minutes for feedback, retries, and a short discussion. Use the task-specific maximum points: Lab 1 uses 20/20/20/40; other labs use 25 each. Ask: Why is the "ask exactly one question at a time" rule important in an interview prompt? Correct answer: To prevent the AI from dumping 20 questions on you at once in a single message.. Never use model self-confidence as proof of correctness.</a:t>
+              <a:t>Reserve 5 minutes for feedback, retries, and a short discussion. Use the task-specific maximum points: Lab 1 uses 20/20/20/40; other labs use 25 each. Ask: In an interview-style prompt, what is the main purpose of an explicit stopping condition (e.g., "after 3 matching accomplishments, say I have enough data and write the letter")? Correct answer: Without it, the model either keeps asking indefinitely or decides on its own when to stop; the condition makes the switch to writing predictable and checkable.. Never use model self-confidence as proof of correctness.</a:t>
             </a:r>
           </a:p>
         </p:txBody>
@@ -2432,7 +2432,7 @@
           <a:lstStyle/>
           <a:p>
             <a:r>
-              <a:t>Reserve 6 minutes for feedback, retries, and a short discussion. Use the task-specific maximum points: Lab 1 uses 20/20/20/40; other labs use 25 each. Ask: Why should you specify exact metrics (like "Error Handling") in a self-critique prompt? Correct answer: If you just say "critique this", the AI won't know what angle to analyze from and will give generic feedback.. Never use model self-confidence as proof of correctness.</a:t>
+              <a:t>Reserve 6 minutes for feedback, retries, and a short discussion. Use the task-specific maximum points: Lab 1 uses 20/20/20/40; other labs use 25 each. Ask: In the pitch-email chain, why send the self-critique as a separate turn instead of putting draft, critique, and rewrite instructions into one prompt? Correct answer: In one prompt the model tends to skip or fake the critique and jump to a polished answer; separate turns let you inspect each step and force the rewrite to use the listed flaws.. Never use model self-confidence as proof of correctness.</a:t>
             </a:r>
           </a:p>
         </p:txBody>
@@ -2712,7 +2712,7 @@
           <a:lstStyle/>
           <a:p>
             <a:r>
-              <a:t>Reserve 6 minutes for feedback, retries, and a short discussion. Use the task-specific maximum points: Lab 1 uses 20/20/20/40; other labs use 25 each. Ask: What is the best evidence that a revision improves reliability? Correct answer: It improves results on a consistent test set, including an unseen edge case.. Never use model self-confidence as proof of correctness.</a:t>
+              <a:t>Reserve 6 minutes for feedback, retries, and a short discussion. Use the task-specific maximum points: Lab 1 uses 20/20/20/40; other labs use 25 each. Ask: You revised your classifier prompt and it now labels all 4 test inputs correctly (the baseline got 3/4). What is the strongest justified conclusion? Correct answer: The revision is promising; rerun both versions on the same fixed tests plus new unseen edge cases (e.g., an injection attempt) and keep the failures before claiming it is more reliable.. Never use model self-confidence as proof of correctness.</a:t>
             </a:r>
           </a:p>
         </p:txBody>
@@ -3342,7 +3342,7 @@
           <a:lstStyle/>
           <a:p>
             <a:r>
-              <a:t>Reserve 6 minutes for feedback, retries, and a short discussion. Use the task-specific maximum points: Lab 1 uses 20/20/20/40; other labs use 25 each. Ask: Which prompt best applies all four scene-setting elements to this hiring task? Correct answer: Act as a technical recruiter; address Python backend candidates; use a professional, welcoming tone; write three short paragraphs including a concrete project example and an application CTA.. Never use model self-confidence as proof of correctness.</a:t>
+              <a:t>Reserve 6 minutes for feedback, retries, and a short discussion. Use the task-specific maximum points: Lab 1 uses 20/20/20/40; other labs use 25 each. Ask: Do large language models remember your previous conversations? Correct answer: No. The model's weights do not change between chats; it only "knows" what is inside the current context window. Apps that seem to remember you are re-inserting saved notes into the prompt.. Never use model self-confidence as proof of correctness.</a:t>
             </a:r>
           </a:p>
         </p:txBody>
